--- a/3. Stimuli/OMIT Stimuli/OMIT Stim A.pptx
+++ b/3. Stimuli/OMIT Stimuli/OMIT Stim A.pptx
@@ -4122,7 +4122,15 @@
             </a:pPr>
             <a:r>
               <a:rPr lang="en"/>
-              <a:t>And Kendall is still feeling happy today after learning about elephants.</a:t>
+              <a:t>And Kendall is still feeling happy today, even after learning an </a:t>
+            </a:r>
+            <a:r>
+              <a:rPr lang="en"/>
+              <a:t>interesting</a:t>
+            </a:r>
+            <a:r>
+              <a:rPr lang="en"/>
+              <a:t> fact about elephants.</a:t>
             </a:r>
             <a:endParaRPr b="1"/>
           </a:p>
@@ -4974,7 +4982,8 @@
               <a:buNone/>
             </a:pPr>
             <a:r>
-              <a:t/>
+              <a:rPr lang="en"/>
+              <a:t>Which classmate did Kendall tell about elephants?</a:t>
             </a:r>
             <a:endParaRPr/>
           </a:p>
@@ -5091,7 +5100,8 @@
               <a:buNone/>
             </a:pPr>
             <a:r>
-              <a:t/>
+              <a:rPr lang="en"/>
+              <a:t>Which classmate did Kendall tell about feeling happy?</a:t>
             </a:r>
             <a:endParaRPr/>
           </a:p>
@@ -31047,7 +31057,7 @@
         <p:spPr>
           <a:xfrm>
             <a:off x="2201400" y="3011100"/>
-            <a:ext cx="1367325" cy="1669949"/>
+            <a:ext cx="1437400" cy="1755534"/>
           </a:xfrm>
           <a:prstGeom prst="rect">
             <a:avLst/>
@@ -35330,7 +35340,7 @@
         </p:nvSpPr>
         <p:spPr>
           <a:xfrm>
-            <a:off x="2268175" y="927250"/>
+            <a:off x="2517750" y="964075"/>
             <a:ext cx="4108500" cy="461700"/>
           </a:xfrm>
           <a:prstGeom prst="rect">
